--- a/Comal_mgt_presentation/EAHCP_Landa_Lake.pptx
+++ b/Comal_mgt_presentation/EAHCP_Landa_Lake.pptx
@@ -10046,7 +10046,7 @@
               <a:buNone/>
             </a:pPr>
             <a:r>
-              <a:rPr lang="en-US" sz="2900" b="1" dirty="0">
+              <a:rPr lang="en-US" sz="2900" b="1">
                 <a:solidFill>
                   <a:srgbClr val="123240"/>
                 </a:solidFill>
@@ -10056,7 +10056,7 @@
               </a:rPr>
               <a:t>Edwards Aquifer Region Drought</a:t>
             </a:r>
-            <a:endParaRPr lang="en-US" sz="2900" dirty="0"/>
+            <a:endParaRPr lang="en-US" sz="2900"/>
           </a:p>
         </p:txBody>
       </p:sp>
@@ -10085,7 +10085,7 @@
               <a:buNone/>
             </a:pPr>
             <a:r>
-              <a:rPr lang="en-US" sz="750" b="1" dirty="0">
+              <a:rPr lang="en-US" sz="750" b="1">
                 <a:solidFill>
                   <a:srgbClr val="65737A"/>
                 </a:solidFill>
@@ -10095,7 +10095,7 @@
               </a:rPr>
               <a:t>04</a:t>
             </a:r>
-            <a:endParaRPr lang="en-US" sz="750" dirty="0"/>
+            <a:endParaRPr lang="en-US" sz="750"/>
           </a:p>
         </p:txBody>
       </p:sp>
@@ -10124,14 +10124,14 @@
               <a:buNone/>
             </a:pPr>
             <a:r>
-              <a:rPr lang="en-US" sz="900" b="1" dirty="0">
+              <a:rPr lang="en-US" sz="900" b="1">
                 <a:solidFill>
                   <a:srgbClr val="123240"/>
                 </a:solidFill>
               </a:rPr>
               <a:t>ROLLING MONTHLY SPRINGFLOW</a:t>
             </a:r>
-            <a:endParaRPr lang="en-US" sz="900" dirty="0"/>
+            <a:endParaRPr lang="en-US" sz="900"/>
           </a:p>
         </p:txBody>
       </p:sp>
@@ -10196,7 +10196,7 @@
               <a:buNone/>
             </a:pPr>
             <a:r>
-              <a:rPr lang="en-US" sz="1400" dirty="0">
+              <a:rPr lang="en-US" sz="1400">
                 <a:solidFill>
                   <a:srgbClr val="243036"/>
                 </a:solidFill>
@@ -10204,7 +10204,7 @@
               <a:t>Current drought has reduced </a:t>
             </a:r>
             <a:r>
-              <a:rPr lang="en-US" sz="1400" dirty="0" err="1">
+              <a:rPr lang="en-US" sz="1400" err="1">
                 <a:solidFill>
                   <a:srgbClr val="243036"/>
                 </a:solidFill>
@@ -10212,14 +10212,14 @@
               <a:t>springflows</a:t>
             </a:r>
             <a:r>
-              <a:rPr lang="en-US" sz="1400" dirty="0">
+              <a:rPr lang="en-US" sz="1400">
                 <a:solidFill>
                   <a:srgbClr val="243036"/>
                 </a:solidFill>
               </a:rPr>
               <a:t> at Comal to levels not experienced since the drought of record in the 1950s. </a:t>
             </a:r>
-            <a:endParaRPr lang="en-US" sz="1400" dirty="0"/>
+            <a:endParaRPr lang="en-US" sz="1400"/>
           </a:p>
         </p:txBody>
       </p:sp>
@@ -10250,7 +10250,7 @@
               <a:buNone/>
             </a:pPr>
             <a:r>
-              <a:rPr lang="en-US" sz="1100" b="1" dirty="0">
+              <a:rPr lang="en-US" sz="1100" b="1">
                 <a:solidFill>
                   <a:srgbClr val="3B5B45"/>
                 </a:solidFill>
@@ -10258,7 +10258,7 @@
               <a:t>Daily mean </a:t>
             </a:r>
             <a:r>
-              <a:rPr lang="en-US" sz="1100" b="1" dirty="0" err="1">
+              <a:rPr lang="en-US" sz="1100" b="1" err="1">
                 <a:solidFill>
                   <a:srgbClr val="3B5B45"/>
                 </a:solidFill>
@@ -10266,7 +10266,7 @@
               <a:t>springflow</a:t>
             </a:r>
             <a:r>
-              <a:rPr lang="en-US" sz="1100" b="1" dirty="0">
+              <a:rPr lang="en-US" sz="1100" b="1">
                 <a:solidFill>
                   <a:srgbClr val="3B5B45"/>
                 </a:solidFill>
@@ -10274,7 +10274,7 @@
               <a:t> from USGS gage </a:t>
             </a:r>
             <a:r>
-              <a:rPr lang="en-US" sz="1100" b="1" dirty="0" err="1">
+              <a:rPr lang="en-US" sz="1100" b="1" err="1">
                 <a:solidFill>
                   <a:srgbClr val="3B5B45"/>
                 </a:solidFill>
@@ -10282,7 +10282,7 @@
               <a:t>xxxx</a:t>
             </a:r>
             <a:r>
-              <a:rPr lang="en-US" sz="1100" b="1" dirty="0">
+              <a:rPr lang="en-US" sz="1100" b="1">
                 <a:solidFill>
                   <a:srgbClr val="3B5B45"/>
                 </a:solidFill>
@@ -10290,7 +10290,7 @@
               <a:t> – Comal Springs, was aggregated to monthly means. Rolling averages represent the mean of consecutive monthly </a:t>
             </a:r>
             <a:r>
-              <a:rPr lang="en-US" sz="1100" b="1" dirty="0" err="1">
+              <a:rPr lang="en-US" sz="1100" b="1" err="1">
                 <a:solidFill>
                   <a:srgbClr val="3B5B45"/>
                 </a:solidFill>
@@ -10298,14 +10298,14 @@
               <a:t>springflow</a:t>
             </a:r>
             <a:r>
-              <a:rPr lang="en-US" sz="1100" b="1" dirty="0">
+              <a:rPr lang="en-US" sz="1100" b="1">
                 <a:solidFill>
                   <a:srgbClr val="3B5B45"/>
                 </a:solidFill>
               </a:rPr>
               <a:t> values over the indicated 1- to 60-month periods.</a:t>
             </a:r>
-            <a:endParaRPr lang="en-US" sz="1100" dirty="0"/>
+            <a:endParaRPr lang="en-US" sz="1100"/>
           </a:p>
         </p:txBody>
       </p:sp>
@@ -10561,7 +10561,7 @@
               <a:buNone/>
             </a:pPr>
             <a:r>
-              <a:rPr lang="en-US" sz="2900" b="1" dirty="0">
+              <a:rPr lang="en-US" sz="2900" b="1">
                 <a:solidFill>
                   <a:srgbClr val="123240"/>
                 </a:solidFill>
@@ -10571,7 +10571,7 @@
               </a:rPr>
               <a:t>Edwards Aquifer Region Drought</a:t>
             </a:r>
-            <a:endParaRPr lang="en-US" sz="2900" dirty="0"/>
+            <a:endParaRPr lang="en-US" sz="2900"/>
           </a:p>
         </p:txBody>
       </p:sp>
@@ -10606,7 +10606,7 @@
               <a:buNone/>
             </a:pPr>
             <a:r>
-              <a:rPr lang="en-US" sz="750" b="1" dirty="0">
+              <a:rPr lang="en-US" sz="750" b="1">
                 <a:solidFill>
                   <a:srgbClr val="65737A"/>
                 </a:solidFill>
@@ -10616,7 +10616,7 @@
               </a:rPr>
               <a:t>04</a:t>
             </a:r>
-            <a:endParaRPr lang="en-US" sz="750" dirty="0"/>
+            <a:endParaRPr lang="en-US" sz="750"/>
           </a:p>
         </p:txBody>
       </p:sp>
@@ -10651,14 +10651,14 @@
               <a:buNone/>
             </a:pPr>
             <a:r>
-              <a:rPr lang="en-US" sz="900" b="1" dirty="0">
+              <a:rPr lang="en-US" sz="900" b="1">
                 <a:solidFill>
                   <a:srgbClr val="123240"/>
                 </a:solidFill>
               </a:rPr>
               <a:t>ROLLING MONTHLY SPRINGFLOW</a:t>
             </a:r>
-            <a:endParaRPr lang="en-US" sz="900" dirty="0"/>
+            <a:endParaRPr lang="en-US" sz="900"/>
           </a:p>
         </p:txBody>
       </p:sp>
@@ -10695,7 +10695,7 @@
               <a:buNone/>
             </a:pPr>
             <a:r>
-              <a:rPr lang="en-US" sz="1400" dirty="0">
+              <a:rPr lang="en-US" sz="1400">
                 <a:solidFill>
                   <a:srgbClr val="243036"/>
                 </a:solidFill>
@@ -10703,7 +10703,7 @@
               <a:t>Current drought has reduced </a:t>
             </a:r>
             <a:r>
-              <a:rPr lang="en-US" sz="1400" dirty="0" err="1">
+              <a:rPr lang="en-US" sz="1400" err="1">
                 <a:solidFill>
                   <a:srgbClr val="243036"/>
                 </a:solidFill>
@@ -10711,14 +10711,14 @@
               <a:t>springflows</a:t>
             </a:r>
             <a:r>
-              <a:rPr lang="en-US" sz="1400" dirty="0">
+              <a:rPr lang="en-US" sz="1400">
                 <a:solidFill>
                   <a:srgbClr val="243036"/>
                 </a:solidFill>
               </a:rPr>
               <a:t> at Comal to levels not experienced since the drought of record in the 1950s. </a:t>
             </a:r>
-            <a:endParaRPr lang="en-US" sz="1400" dirty="0"/>
+            <a:endParaRPr lang="en-US" sz="1400"/>
           </a:p>
         </p:txBody>
       </p:sp>
@@ -10759,15 +10759,15 @@
           <a:lstStyle/>
           <a:p>
             <a:r>
-              <a:rPr lang="en-US" sz="1050" b="1" dirty="0"/>
+              <a:rPr lang="en-US" sz="1050" b="1"/>
               <a:t>Points show the 50 lowest rolling-average </a:t>
             </a:r>
             <a:r>
-              <a:rPr lang="en-US" sz="1050" b="1" dirty="0" err="1"/>
+              <a:rPr lang="en-US" sz="1050" b="1" err="1"/>
               <a:t>springflow</a:t>
             </a:r>
             <a:r>
-              <a:rPr lang="en-US" sz="1050" b="1" dirty="0"/>
+              <a:rPr lang="en-US" sz="1050" b="1"/>
               <a:t> values for each averaging duration. Rolling periods overlap; for example, consecutive 12-month values may represent Jan–Dec 2024, Feb 2024–Jan 2025, and Mar 2024–Feb 2025. Colors identify periods ending in the 1950s and 2020s; all other periods are shown in black.</a:t>
             </a:r>
           </a:p>
@@ -10805,7 +10805,7 @@
             <a:pPr marL="0" indent="0">
               <a:buNone/>
             </a:pPr>
-            <a:endParaRPr lang="en-US" sz="1100" dirty="0"/>
+            <a:endParaRPr lang="en-US" sz="1100"/>
           </a:p>
         </p:txBody>
       </p:sp>
@@ -11066,7 +11066,7 @@
               <a:buNone/>
             </a:pPr>
             <a:r>
-              <a:rPr lang="en-US" sz="2900" b="1" dirty="0">
+              <a:rPr lang="en-US" sz="2900" b="1">
                 <a:solidFill>
                   <a:srgbClr val="123240"/>
                 </a:solidFill>
@@ -11076,7 +11076,7 @@
               </a:rPr>
               <a:t>Landa Lake Drought Management</a:t>
             </a:r>
-            <a:endParaRPr lang="en-US" sz="2900" dirty="0"/>
+            <a:endParaRPr lang="en-US" sz="2900"/>
           </a:p>
         </p:txBody>
       </p:sp>
@@ -11201,14 +11201,14 @@
               <a:buNone/>
             </a:pPr>
             <a:r>
-              <a:rPr lang="en-US" sz="900" b="1" dirty="0">
+              <a:rPr lang="en-US" sz="900" b="1">
                 <a:solidFill>
                   <a:srgbClr val="123240"/>
                 </a:solidFill>
               </a:rPr>
               <a:t>PRESSURE POINTS</a:t>
             </a:r>
-            <a:endParaRPr lang="en-US" sz="900" dirty="0"/>
+            <a:endParaRPr lang="en-US" sz="900"/>
           </a:p>
         </p:txBody>
       </p:sp>
@@ -11245,7 +11245,7 @@
               <a:buNone/>
             </a:pPr>
             <a:r>
-              <a:rPr lang="en-US" sz="1650" dirty="0">
+              <a:rPr lang="en-US" sz="1650">
                 <a:solidFill>
                   <a:srgbClr val="243036"/>
                 </a:solidFill>
@@ -11258,7 +11258,7 @@
               <a:buNone/>
             </a:pPr>
             <a:r>
-              <a:rPr lang="en-US" sz="1650" dirty="0">
+              <a:rPr lang="en-US" sz="1650">
                 <a:solidFill>
                   <a:srgbClr val="243036"/>
                 </a:solidFill>
@@ -11271,7 +11271,7 @@
               <a:buNone/>
             </a:pPr>
             <a:r>
-              <a:rPr lang="en-US" sz="1650" dirty="0">
+              <a:rPr lang="en-US" sz="1650">
                 <a:solidFill>
                   <a:srgbClr val="243036"/>
                 </a:solidFill>
@@ -11284,7 +11284,7 @@
               <a:buNone/>
             </a:pPr>
             <a:r>
-              <a:rPr lang="en-US" sz="1650" dirty="0">
+              <a:rPr lang="en-US" sz="1650">
                 <a:solidFill>
                   <a:srgbClr val="243036"/>
                 </a:solidFill>
@@ -11297,14 +11297,14 @@
               <a:buNone/>
             </a:pPr>
             <a:r>
-              <a:rPr lang="en-US" sz="1650" dirty="0">
+              <a:rPr lang="en-US" sz="1650">
                 <a:solidFill>
                   <a:srgbClr val="243036"/>
                 </a:solidFill>
               </a:rPr>
               <a:t>Culvert Works – DS Flow</a:t>
             </a:r>
-            <a:endParaRPr lang="en-US" sz="1650" dirty="0"/>
+            <a:endParaRPr lang="en-US" sz="1650"/>
           </a:p>
         </p:txBody>
       </p:sp>
@@ -11381,7 +11381,7 @@
               <a:buNone/>
             </a:pPr>
             <a:r>
-              <a:rPr lang="en-US" sz="1050" dirty="0">
+              <a:rPr lang="en-US" sz="1050">
                 <a:solidFill>
                   <a:srgbClr val="65737A"/>
                 </a:solidFill>
@@ -11389,7 +11389,7 @@
               <a:t>Need a map here </a:t>
             </a:r>
             <a:r>
-              <a:rPr lang="en-US" sz="1050" dirty="0" err="1">
+              <a:rPr lang="en-US" sz="1050" err="1">
                 <a:solidFill>
                   <a:srgbClr val="65737A"/>
                 </a:solidFill>
@@ -11397,14 +11397,14 @@
               <a:t>fo</a:t>
             </a:r>
             <a:r>
-              <a:rPr lang="en-US" sz="1050" dirty="0">
+              <a:rPr lang="en-US" sz="1050">
                 <a:solidFill>
                   <a:srgbClr val="65737A"/>
                 </a:solidFill>
               </a:rPr>
               <a:t> sure</a:t>
             </a:r>
-            <a:endParaRPr lang="en-US" sz="1050" dirty="0"/>
+            <a:endParaRPr lang="en-US" sz="1050"/>
           </a:p>
         </p:txBody>
       </p:sp>
@@ -11603,14 +11603,14 @@
               <a:buNone/>
             </a:pPr>
             <a:r>
-              <a:rPr lang="en-US" sz="950" b="1" dirty="0">
+              <a:rPr lang="en-US" sz="950" b="1">
                 <a:solidFill>
                   <a:srgbClr val="3B5B45"/>
                 </a:solidFill>
               </a:rPr>
               <a:t>TAKEAWAY  ·  Explain what changed, why it matters for habitat, and what the program is doing about it.</a:t>
             </a:r>
-            <a:endParaRPr lang="en-US" sz="950" dirty="0"/>
+            <a:endParaRPr lang="en-US" sz="950"/>
           </a:p>
         </p:txBody>
       </p:sp>
@@ -11841,7 +11841,7 @@
               <a:buNone/>
             </a:pPr>
             <a:r>
-              <a:rPr lang="en-US" sz="2900" b="1" dirty="0">
+              <a:rPr lang="en-US" sz="2900" b="1">
                 <a:solidFill>
                   <a:srgbClr val="123240"/>
                 </a:solidFill>
@@ -11851,7 +11851,7 @@
               </a:rPr>
               <a:t>Management Tools Available</a:t>
             </a:r>
-            <a:endParaRPr lang="en-US" sz="2900" dirty="0"/>
+            <a:endParaRPr lang="en-US" sz="2900"/>
           </a:p>
         </p:txBody>
       </p:sp>
@@ -12226,14 +12226,14 @@
               <a:buNone/>
             </a:pPr>
             <a:r>
-              <a:rPr lang="en-US" sz="1220" b="1" dirty="0">
+              <a:rPr lang="en-US" sz="1220" b="1">
                 <a:solidFill>
                   <a:srgbClr val="123240"/>
                 </a:solidFill>
               </a:rPr>
               <a:t>Vegetation Management</a:t>
             </a:r>
-            <a:endParaRPr lang="en-US" sz="1220" dirty="0"/>
+            <a:endParaRPr lang="en-US" sz="1220"/>
           </a:p>
         </p:txBody>
       </p:sp>
@@ -12448,14 +12448,14 @@
               <a:buNone/>
             </a:pPr>
             <a:r>
-              <a:rPr lang="en-US" sz="1220" b="1" dirty="0">
+              <a:rPr lang="en-US" sz="1220" b="1">
                 <a:solidFill>
                   <a:srgbClr val="123240"/>
                 </a:solidFill>
               </a:rPr>
               <a:t>Flow Split Management</a:t>
             </a:r>
-            <a:endParaRPr lang="en-US" sz="1220" dirty="0"/>
+            <a:endParaRPr lang="en-US" sz="1220"/>
           </a:p>
         </p:txBody>
       </p:sp>
@@ -12670,7 +12670,7 @@
               <a:buNone/>
             </a:pPr>
             <a:r>
-              <a:rPr lang="en-US" sz="1220" b="1" dirty="0">
+              <a:rPr lang="en-US" sz="1220" b="1">
                 <a:solidFill>
                   <a:srgbClr val="123240"/>
                 </a:solidFill>
@@ -12678,14 +12678,14 @@
               <a:t>Riparian </a:t>
             </a:r>
             <a:r>
-              <a:rPr lang="en-US" sz="1220" b="1" dirty="0" err="1">
+              <a:rPr lang="en-US" sz="1220" b="1" err="1">
                 <a:solidFill>
                   <a:srgbClr val="123240"/>
                 </a:solidFill>
               </a:rPr>
               <a:t>Managment</a:t>
             </a:r>
-            <a:endParaRPr lang="en-US" sz="1220" dirty="0"/>
+            <a:endParaRPr lang="en-US" sz="1220"/>
           </a:p>
         </p:txBody>
       </p:sp>
@@ -12900,14 +12900,14 @@
               <a:buNone/>
             </a:pPr>
             <a:r>
-              <a:rPr lang="en-US" sz="1220" b="1" dirty="0">
+              <a:rPr lang="en-US" sz="1220" b="1">
                 <a:solidFill>
                   <a:srgbClr val="123240"/>
                 </a:solidFill>
               </a:rPr>
               <a:t>Monitoring</a:t>
             </a:r>
-            <a:endParaRPr lang="en-US" sz="1220" dirty="0"/>
+            <a:endParaRPr lang="en-US" sz="1220"/>
           </a:p>
         </p:txBody>
       </p:sp>
@@ -13318,7 +13318,7 @@
               <a:buNone/>
             </a:pPr>
             <a:r>
-              <a:rPr lang="en-US" sz="2900" b="1" dirty="0">
+              <a:rPr lang="en-US" sz="2900" b="1">
                 <a:solidFill>
                   <a:srgbClr val="123240"/>
                 </a:solidFill>
@@ -13328,7 +13328,7 @@
               </a:rPr>
               <a:t>Landa Lake During Drought</a:t>
             </a:r>
-            <a:endParaRPr lang="en-US" sz="2900" dirty="0"/>
+            <a:endParaRPr lang="en-US" sz="2900"/>
           </a:p>
         </p:txBody>
       </p:sp>
